--- a/catalog/relations/templates/rel_sequence_5_8_lr.pptx
+++ b/catalog/relations/templates/rel_sequence_5_8_lr.pptx
@@ -4309,7 +4309,7 @@
         <p:spPr>
           <a:xfrm>
             <a:off x="731520" y="2971800"/>
-            <a:ext cx="10698480" cy="283464"/>
+            <a:ext cx="10698480" cy="237744"/>
           </a:xfrm>
           <a:prstGeom prst="rect">
             <a:avLst/>
@@ -4474,8 +4474,8 @@
         </p:nvSpPr>
         <p:spPr>
           <a:xfrm>
-            <a:off x="731520" y="3335274"/>
-            <a:ext cx="10698480" cy="283464"/>
+            <a:off x="731520" y="3328416"/>
+            <a:ext cx="10698480" cy="237744"/>
           </a:xfrm>
           <a:prstGeom prst="rect">
             <a:avLst/>
@@ -4531,7 +4531,7 @@
         </p:nvCxnSpPr>
         <p:spPr>
           <a:xfrm>
-            <a:off x="914400" y="3646170"/>
+            <a:off x="914400" y="3639312"/>
             <a:ext cx="10058400" cy="0"/>
           </a:xfrm>
           <a:prstGeom prst="line">
@@ -4567,7 +4567,7 @@
         </p:nvCxnSpPr>
         <p:spPr>
           <a:xfrm>
-            <a:off x="914400" y="3646170"/>
+            <a:off x="914400" y="3639312"/>
             <a:ext cx="10058400" cy="0"/>
           </a:xfrm>
           <a:prstGeom prst="line">
@@ -4603,7 +4603,7 @@
         </p:nvCxnSpPr>
         <p:spPr>
           <a:xfrm>
-            <a:off x="914400" y="3646170"/>
+            <a:off x="914400" y="3639312"/>
             <a:ext cx="10058400" cy="0"/>
           </a:xfrm>
           <a:prstGeom prst="line">
@@ -4640,8 +4640,8 @@
         </p:nvSpPr>
         <p:spPr>
           <a:xfrm>
-            <a:off x="731520" y="3698748"/>
-            <a:ext cx="10698480" cy="283464"/>
+            <a:off x="731520" y="3685032"/>
+            <a:ext cx="10698480" cy="237744"/>
           </a:xfrm>
           <a:prstGeom prst="rect">
             <a:avLst/>
@@ -4697,7 +4697,7 @@
         </p:nvCxnSpPr>
         <p:spPr>
           <a:xfrm>
-            <a:off x="914400" y="4009644"/>
+            <a:off x="914400" y="3995928"/>
             <a:ext cx="10058400" cy="0"/>
           </a:xfrm>
           <a:prstGeom prst="line">
@@ -4733,7 +4733,7 @@
         </p:nvCxnSpPr>
         <p:spPr>
           <a:xfrm>
-            <a:off x="914400" y="4009644"/>
+            <a:off x="914400" y="3995928"/>
             <a:ext cx="10058400" cy="0"/>
           </a:xfrm>
           <a:prstGeom prst="line">
@@ -4769,7 +4769,7 @@
         </p:nvCxnSpPr>
         <p:spPr>
           <a:xfrm>
-            <a:off x="914400" y="4009644"/>
+            <a:off x="914400" y="3995928"/>
             <a:ext cx="10058400" cy="0"/>
           </a:xfrm>
           <a:prstGeom prst="line">
@@ -4806,8 +4806,8 @@
         </p:nvSpPr>
         <p:spPr>
           <a:xfrm>
-            <a:off x="731520" y="4062222"/>
-            <a:ext cx="10698480" cy="283464"/>
+            <a:off x="731520" y="4041648"/>
+            <a:ext cx="10698480" cy="237744"/>
           </a:xfrm>
           <a:prstGeom prst="rect">
             <a:avLst/>
@@ -4863,7 +4863,7 @@
         </p:nvCxnSpPr>
         <p:spPr>
           <a:xfrm>
-            <a:off x="914400" y="4373118"/>
+            <a:off x="914400" y="4352544"/>
             <a:ext cx="10058400" cy="0"/>
           </a:xfrm>
           <a:prstGeom prst="line">
@@ -4899,7 +4899,7 @@
         </p:nvCxnSpPr>
         <p:spPr>
           <a:xfrm>
-            <a:off x="914400" y="4373118"/>
+            <a:off x="914400" y="4352544"/>
             <a:ext cx="10058400" cy="0"/>
           </a:xfrm>
           <a:prstGeom prst="line">
@@ -4935,7 +4935,7 @@
         </p:nvCxnSpPr>
         <p:spPr>
           <a:xfrm>
-            <a:off x="914400" y="4373118"/>
+            <a:off x="914400" y="4352544"/>
             <a:ext cx="10058400" cy="0"/>
           </a:xfrm>
           <a:prstGeom prst="line">
@@ -4972,8 +4972,8 @@
         </p:nvSpPr>
         <p:spPr>
           <a:xfrm>
-            <a:off x="731520" y="4425696"/>
-            <a:ext cx="10698480" cy="283464"/>
+            <a:off x="731520" y="4398264"/>
+            <a:ext cx="10698480" cy="237744"/>
           </a:xfrm>
           <a:prstGeom prst="rect">
             <a:avLst/>
@@ -5029,7 +5029,7 @@
         </p:nvCxnSpPr>
         <p:spPr>
           <a:xfrm>
-            <a:off x="914400" y="4736592"/>
+            <a:off x="914400" y="4709160"/>
             <a:ext cx="10058400" cy="0"/>
           </a:xfrm>
           <a:prstGeom prst="line">
@@ -5065,7 +5065,7 @@
         </p:nvCxnSpPr>
         <p:spPr>
           <a:xfrm>
-            <a:off x="914400" y="4736592"/>
+            <a:off x="914400" y="4709160"/>
             <a:ext cx="10058400" cy="0"/>
           </a:xfrm>
           <a:prstGeom prst="line">
@@ -5101,7 +5101,7 @@
         </p:nvCxnSpPr>
         <p:spPr>
           <a:xfrm>
-            <a:off x="914400" y="4736592"/>
+            <a:off x="914400" y="4709160"/>
             <a:ext cx="10058400" cy="0"/>
           </a:xfrm>
           <a:prstGeom prst="line">
@@ -5138,8 +5138,8 @@
         </p:nvSpPr>
         <p:spPr>
           <a:xfrm>
-            <a:off x="731520" y="4789170"/>
-            <a:ext cx="10698480" cy="283464"/>
+            <a:off x="731520" y="4754880"/>
+            <a:ext cx="10698480" cy="237744"/>
           </a:xfrm>
           <a:prstGeom prst="rect">
             <a:avLst/>
@@ -5195,7 +5195,7 @@
         </p:nvCxnSpPr>
         <p:spPr>
           <a:xfrm>
-            <a:off x="914400" y="5100066"/>
+            <a:off x="914400" y="5065776"/>
             <a:ext cx="10058400" cy="0"/>
           </a:xfrm>
           <a:prstGeom prst="line">
@@ -5231,7 +5231,7 @@
         </p:nvCxnSpPr>
         <p:spPr>
           <a:xfrm>
-            <a:off x="914400" y="5100066"/>
+            <a:off x="914400" y="5065776"/>
             <a:ext cx="10058400" cy="0"/>
           </a:xfrm>
           <a:prstGeom prst="line">
@@ -5267,7 +5267,7 @@
         </p:nvCxnSpPr>
         <p:spPr>
           <a:xfrm>
-            <a:off x="914400" y="5100066"/>
+            <a:off x="914400" y="5065776"/>
             <a:ext cx="10058400" cy="0"/>
           </a:xfrm>
           <a:prstGeom prst="line">
@@ -5304,8 +5304,8 @@
         </p:nvSpPr>
         <p:spPr>
           <a:xfrm>
-            <a:off x="731520" y="5152644"/>
-            <a:ext cx="10698480" cy="283464"/>
+            <a:off x="731520" y="5111496"/>
+            <a:ext cx="10698480" cy="237744"/>
           </a:xfrm>
           <a:prstGeom prst="rect">
             <a:avLst/>
@@ -5361,7 +5361,7 @@
         </p:nvCxnSpPr>
         <p:spPr>
           <a:xfrm>
-            <a:off x="914400" y="5463540"/>
+            <a:off x="914400" y="5422392"/>
             <a:ext cx="10058400" cy="0"/>
           </a:xfrm>
           <a:prstGeom prst="line">
@@ -5397,7 +5397,7 @@
         </p:nvCxnSpPr>
         <p:spPr>
           <a:xfrm>
-            <a:off x="914400" y="5463540"/>
+            <a:off x="914400" y="5422392"/>
             <a:ext cx="10058400" cy="0"/>
           </a:xfrm>
           <a:prstGeom prst="line">
@@ -5433,7 +5433,7 @@
         </p:nvCxnSpPr>
         <p:spPr>
           <a:xfrm>
-            <a:off x="914400" y="5463540"/>
+            <a:off x="914400" y="5422392"/>
             <a:ext cx="10058400" cy="0"/>
           </a:xfrm>
           <a:prstGeom prst="line">
@@ -5470,8 +5470,8 @@
         </p:nvSpPr>
         <p:spPr>
           <a:xfrm>
-            <a:off x="731520" y="5516118"/>
-            <a:ext cx="10698480" cy="283464"/>
+            <a:off x="731520" y="5468112"/>
+            <a:ext cx="10698480" cy="237744"/>
           </a:xfrm>
           <a:prstGeom prst="rect">
             <a:avLst/>
@@ -5527,7 +5527,7 @@
         </p:nvCxnSpPr>
         <p:spPr>
           <a:xfrm>
-            <a:off x="914400" y="5827014"/>
+            <a:off x="914400" y="5779008"/>
             <a:ext cx="10058400" cy="0"/>
           </a:xfrm>
           <a:prstGeom prst="line">
@@ -5563,7 +5563,7 @@
         </p:nvCxnSpPr>
         <p:spPr>
           <a:xfrm>
-            <a:off x="914400" y="5827014"/>
+            <a:off x="914400" y="5779008"/>
             <a:ext cx="10058400" cy="0"/>
           </a:xfrm>
           <a:prstGeom prst="line">
@@ -5599,7 +5599,7 @@
         </p:nvCxnSpPr>
         <p:spPr>
           <a:xfrm>
-            <a:off x="914400" y="5827014"/>
+            <a:off x="914400" y="5779008"/>
             <a:ext cx="10058400" cy="0"/>
           </a:xfrm>
           <a:prstGeom prst="line">
